--- a/Factor_Analysis_Disney_Presentation.pptx
+++ b/Factor_Analysis_Disney_Presentation.pptx
@@ -3204,7 +3204,7 @@
               </a:defRPr>
             </a:pPr>
             <a:r>
-              <a:t>Brand Equity Analysis: Disney &amp; Media Companies</a:t>
+              <a:t>Brand Equity Analysis: The Walt Disney Company</a:t>
             </a:r>
           </a:p>
         </p:txBody>
@@ -7716,7 +7716,7 @@
               </a:defRPr>
             </a:pPr>
             <a:r>
-              <a:t>Implications for Media Companies:</a:t>
+              <a:t>Implications for Disney:</a:t>
             </a:r>
           </a:p>
           <a:p>
@@ -7800,7 +7800,7 @@
               </a:defRPr>
             </a:pPr>
             <a:r>
-              <a:t>For NBCUniversal:</a:t>
+              <a:t>Strategic Recommendations:</a:t>
             </a:r>
           </a:p>
           <a:p>
@@ -7815,7 +7815,7 @@
               </a:defRPr>
             </a:pPr>
             <a:r>
-              <a:t>Strengthen brand image through franchise experiences</a:t>
+              <a:t>Brand awareness alone is insufficient for Disney</a:t>
             </a:r>
           </a:p>
           <a:p>
@@ -7830,7 +7830,7 @@
               </a:defRPr>
             </a:pPr>
             <a:r>
-              <a:t>Develop Peacock loyalty features</a:t>
+              <a:t>Focus on emotional engagement over awareness</a:t>
             </a:r>
           </a:p>
           <a:p>
@@ -7845,7 +7845,7 @@
               </a:defRPr>
             </a:pPr>
             <a:r>
-              <a:t>Universal Studios immersive attractions</a:t>
+              <a:t>Loyalty drives long-term brand equity</a:t>
             </a:r>
           </a:p>
           <a:p>
@@ -7859,65 +7859,8 @@
                 </a:solidFill>
               </a:defRPr>
             </a:pPr>
-          </a:p>
-          <a:p>
-            <a:pPr>
-              <a:spcAft>
-                <a:spcPts val="600"/>
-              </a:spcAft>
-              <a:defRPr sz="1400" b="1">
-                <a:solidFill>
-                  <a:srgbClr val="00468C"/>
-                </a:solidFill>
-              </a:defRPr>
-            </a:pPr>
-            <a:r>
-              <a:t>For All Media Companies:</a:t>
-            </a:r>
-          </a:p>
-          <a:p>
-            <a:pPr>
-              <a:spcAft>
-                <a:spcPts val="600"/>
-              </a:spcAft>
-              <a:defRPr sz="1200">
-                <a:solidFill>
-                  <a:srgbClr val="323232"/>
-                </a:solidFill>
-              </a:defRPr>
-            </a:pPr>
-            <a:r>
-              <a:t>Brand awareness alone is insufficient</a:t>
-            </a:r>
-          </a:p>
-          <a:p>
-            <a:pPr>
-              <a:spcAft>
-                <a:spcPts val="600"/>
-              </a:spcAft>
-              <a:defRPr sz="1200">
-                <a:solidFill>
-                  <a:srgbClr val="323232"/>
-                </a:solidFill>
-              </a:defRPr>
-            </a:pPr>
-            <a:r>
-              <a:t>Focus on emotional engagement &gt; awareness</a:t>
-            </a:r>
-          </a:p>
-          <a:p>
-            <a:pPr>
-              <a:spcAft>
-                <a:spcPts val="600"/>
-              </a:spcAft>
-              <a:defRPr sz="1200">
-                <a:solidFill>
-                  <a:srgbClr val="323232"/>
-                </a:solidFill>
-              </a:defRPr>
-            </a:pPr>
-            <a:r>
-              <a:t>Loyalty drives long-term brand equity</a:t>
+            <a:r>
+              <a:t>Theme park experiences reinforce brand image</a:t>
             </a:r>
           </a:p>
         </p:txBody>
@@ -10188,7 +10131,7 @@
               </a:defRPr>
             </a:pPr>
             <a:r>
-              <a:t>Results are context-specific and may not generalize to other entertainment companies like NBCUniversal</a:t>
+              <a:t>Results are context-specific to Disney and may not generalize to other industries</a:t>
             </a:r>
           </a:p>
         </p:txBody>
@@ -10406,7 +10349,7 @@
               </a:defRPr>
             </a:pPr>
             <a:r>
-              <a:t>Include competitor comparison: Disney vs. NBCUniversal vs. Warner Bros.</a:t>
+              <a:t>Include comparison across different Disney business segments</a:t>
             </a:r>
           </a:p>
           <a:p>
@@ -10831,7 +10774,7 @@
               </a:defRPr>
             </a:pPr>
             <a:r>
-              <a:t>For entertainment companies like Disney and NBCUniversal, investing in brand image and customer loyalty yields stronger brand equity than increasing awareness alone</a:t>
+              <a:t>For Disney, investing in brand image and customer loyalty yields stronger brand equity than increasing awareness alone</a:t>
             </a:r>
           </a:p>
         </p:txBody>
@@ -11423,7 +11366,7 @@
               </a:defRPr>
             </a:pPr>
             <a:r>
-              <a:t>• The entertainment industry (Disney, NBCUniversal, Warner Bros.) manages complex brand portfolios across multiple business segments</a:t>
+              <a:t>• The Walt Disney Company manages a complex brand portfolio across multiple business segments</a:t>
             </a:r>
           </a:p>
           <a:p>
@@ -13503,7 +13446,7 @@
               </a:defRPr>
             </a:pPr>
             <a:r>
-              <a:t>Studio Entertainment (Pixar, Marvel, Lucasfilm)</a:t>
+              <a:t>Studio Entertainment</a:t>
             </a:r>
           </a:p>
           <a:p>
@@ -13518,7 +13461,7 @@
               </a:defRPr>
             </a:pPr>
             <a:r>
-              <a:t>Direct-to-Consumer (Disney+, Hulu)</a:t>
+              <a:t>Direct-to-Consumer (Disney+)</a:t>
             </a:r>
           </a:p>
           <a:p>
@@ -13545,7 +13488,7 @@
               </a:defRPr>
             </a:pPr>
             <a:r>
-              <a:t>Competitors:</a:t>
+              <a:t>Why Disney?</a:t>
             </a:r>
           </a:p>
           <a:p>
@@ -13560,7 +13503,7 @@
               </a:defRPr>
             </a:pPr>
             <a:r>
-              <a:t>NBCUniversal (Comcast) - Peacock, Universal Studios</a:t>
+              <a:t>Brand value: $57.0 billion (Brand Finance, 2022)</a:t>
             </a:r>
           </a:p>
           <a:p>
@@ -13575,7 +13518,7 @@
               </a:defRPr>
             </a:pPr>
             <a:r>
-              <a:t>Warner Bros. Discovery - HBO, DC Comics</a:t>
+              <a:t>Global presence across 6 continents</a:t>
             </a:r>
           </a:p>
           <a:p>
@@ -13590,22 +13533,7 @@
               </a:defRPr>
             </a:pPr>
             <a:r>
-              <a:t>Netflix, Amazon Prime Video</a:t>
-            </a:r>
-          </a:p>
-          <a:p>
-            <a:pPr>
-              <a:spcAft>
-                <a:spcPts val="600"/>
-              </a:spcAft>
-              <a:defRPr sz="1300">
-                <a:solidFill>
-                  <a:srgbClr val="323232"/>
-                </a:solidFill>
-              </a:defRPr>
-            </a:pPr>
-            <a:r>
-              <a:t>Paramount Global - CBS, MTV</a:t>
+              <a:t>Nearly 100 years of brand heritage</a:t>
             </a:r>
           </a:p>
         </p:txBody>
